--- a/docs/발표자료/연차ON-프로젝트-설명(미완성본)-2026-09-10.pptx
+++ b/docs/발표자료/연차ON-프로젝트-설명(미완성본)-2026-09-10.pptx
@@ -24523,7 +24523,7 @@
                 </a:solidFill>
                 <a:latin typeface="맑은 고딕"/>
               </a:rPr>
-              <a:t>총관리자도 예외가 아닙니다. 스스로 승인하면 결재라는 절차가 없는 것과 같습니다.</a:t>
+              <a:t>총관리자만 예외입니다 — 그 위에 결재선이 없어 막으면 자기 연차를 처리할 사람이 없습니다.</a:t>
             </a:r>
           </a:p>
         </p:txBody>
@@ -38943,7 +38943,7 @@
                 </a:solidFill>
                 <a:latin typeface="맑은 고딕"/>
               </a:rPr>
-              <a:t>기본 승인자 + 서브 승인자 · 본인 건은 본인이 결재 못 함</a:t>
+              <a:t>기본 승인자 + 서브 승인자 · 본인 건은 본인이 결재 못 함 (총관리자만 예외)</a:t>
             </a:r>
           </a:p>
         </p:txBody>
@@ -39351,7 +39351,7 @@
                 </a:solidFill>
                 <a:latin typeface="맑은 고딕"/>
               </a:rPr>
-              <a:t>승인 전이면 바로, 승인 뒤면 취소 요청 → 다시 결재</a:t>
+              <a:t>승인 전·미래 날짜만이면 바로 취소, 지난 날짜가 섞이면 취소 요청 → 재결재</a:t>
             </a:r>
           </a:p>
         </p:txBody>
